--- a/deck/Whence_pitch.pptx
+++ b/deck/Whence_pitch.pptx
@@ -1709,7 +1709,7 @@
                 <a:ea typeface="Segoe UI Light" pitchFamily="34" charset="-122"/>
                 <a:cs typeface="Segoe UI Light" pitchFamily="34" charset="-120"/>
               </a:rPr>
-              <a:t>SENTINEL</a:t>
+              <a:t>WHENCE</a:t>
             </a:r>
             <a:endParaRPr lang="en-US" sz="8400" dirty="0"/>
           </a:p>
@@ -2097,7 +2097,7 @@
                 <a:ea typeface="Segoe UI" pitchFamily="34" charset="-122"/>
                 <a:cs typeface="Segoe UI" pitchFamily="34" charset="-120"/>
               </a:rPr>
-              <a:t>github.com/Harshith029/Sentinel</a:t>
+              <a:t>github.com/Harshith029/Whence</a:t>
             </a:r>
             <a:endParaRPr lang="en-US" sz="1500" dirty="0"/>
           </a:p>
@@ -2645,6 +2645,10 @@
             </a:outerShdw>
           </a:effectLst>
         </p:spPr>
+        <p:txBody>
+          <a:bodyPr/>
+          <a:p/>
+        </p:txBody>
       </p:sp>
       <p:sp>
         <p:nvSpPr>
@@ -2802,7 +2806,7 @@
                 <a:ea typeface="Segoe UI" pitchFamily="34" charset="-122"/>
                 <a:cs typeface="Segoe UI" pitchFamily="34" charset="-120"/>
               </a:rPr>
-              <a:t>SENTINEL is that layer.</a:t>
+              <a:t>WHENCE is that layer.</a:t>
             </a:r>
             <a:endParaRPr lang="en-US" sz="1500" dirty="0"/>
           </a:p>
@@ -3014,7 +3018,7 @@
                 <a:ea typeface="Segoe UI" pitchFamily="34" charset="-122"/>
                 <a:cs typeface="Segoe UI" pitchFamily="34" charset="-120"/>
               </a:rPr>
-              <a:t>SENTINEL tracks the origin of everything an agent sees, and checks every action against that lineage. If a risky action traces back to untrusted content, it is blocked — no matter how cleverly the attack was phrased.</a:t>
+              <a:t>WHENCE tracks the origin of everything an agent sees, and checks every action against that lineage. If a risky action traces back to untrusted content, it is blocked — no matter how cleverly the attack was phrased.</a:t>
             </a:r>
             <a:endParaRPr lang="en-US" sz="1600" dirty="0"/>
           </a:p>
@@ -3053,6 +3057,10 @@
             </a:outerShdw>
           </a:effectLst>
         </p:spPr>
+        <p:txBody>
+          <a:bodyPr/>
+          <a:p/>
+        </p:txBody>
       </p:sp>
       <p:sp>
         <p:nvSpPr>
@@ -3204,6 +3212,10 @@
             </a:outerShdw>
           </a:effectLst>
         </p:spPr>
+        <p:txBody>
+          <a:bodyPr/>
+          <a:p/>
+        </p:txBody>
       </p:sp>
       <p:sp>
         <p:nvSpPr>
@@ -3355,6 +3367,10 @@
             </a:outerShdw>
           </a:effectLst>
         </p:spPr>
+        <p:txBody>
+          <a:bodyPr/>
+          <a:p/>
+        </p:txBody>
       </p:sp>
       <p:sp>
         <p:nvSpPr>
@@ -3616,6 +3632,10 @@
             </a:outerShdw>
           </a:effectLst>
         </p:spPr>
+        <p:txBody>
+          <a:bodyPr/>
+          <a:p/>
+        </p:txBody>
       </p:sp>
       <p:sp>
         <p:nvSpPr>
@@ -3735,6 +3755,10 @@
             <a:tailEnd type="triangle"/>
           </a:ln>
         </p:spPr>
+        <p:txBody>
+          <a:bodyPr/>
+          <a:p/>
+        </p:txBody>
       </p:sp>
       <p:sp>
         <p:nvSpPr>
@@ -3769,6 +3793,10 @@
             </a:outerShdw>
           </a:effectLst>
         </p:spPr>
+        <p:txBody>
+          <a:bodyPr/>
+          <a:p/>
+        </p:txBody>
       </p:sp>
       <p:sp>
         <p:nvSpPr>
@@ -3803,7 +3831,7 @@
                 <a:ea typeface="Segoe UI" pitchFamily="34" charset="-122"/>
                 <a:cs typeface="Segoe UI" pitchFamily="34" charset="-120"/>
               </a:rPr>
-              <a:t>SENTINEL</a:t>
+              <a:t>WHENCE</a:t>
             </a:r>
             <a:endParaRPr lang="en-US" sz="1700" dirty="0"/>
           </a:p>
@@ -4312,6 +4340,10 @@
             <a:tailEnd type="triangle"/>
           </a:ln>
         </p:spPr>
+        <p:txBody>
+          <a:bodyPr/>
+          <a:p/>
+        </p:txBody>
       </p:sp>
       <p:sp>
         <p:nvSpPr>
@@ -4346,6 +4378,10 @@
             </a:outerShdw>
           </a:effectLst>
         </p:spPr>
+        <p:txBody>
+          <a:bodyPr/>
+          <a:p/>
+        </p:txBody>
       </p:sp>
       <p:sp>
         <p:nvSpPr>
@@ -4436,7 +4472,7 @@
                 <a:ea typeface="Segoe UI" pitchFamily="34" charset="-122"/>
                 <a:cs typeface="Segoe UI" pitchFamily="34" charset="-120"/>
               </a:rPr>
-              <a:t>isolated behind SENTINEL</a:t>
+              <a:t>isolated behind WHENCE</a:t>
             </a:r>
             <a:endParaRPr lang="en-US" sz="1150" dirty="0"/>
           </a:p>
@@ -4478,7 +4514,7 @@
                 <a:ea typeface="Segoe UI" pitchFamily="34" charset="-122"/>
                 <a:cs typeface="Segoe UI" pitchFamily="34" charset="-120"/>
               </a:rPr>
-              <a:t>The tools are reachable only through SENTINEL. Interception is guaranteed by the network itself — there is nothing to forget, disable, or bypass in the agent's code.</a:t>
+              <a:t>The tools are reachable only through WHENCE. Interception is guaranteed by the network itself — there is nothing to forget, disable, or bypass in the agent's code.</a:t>
             </a:r>
             <a:endParaRPr lang="en-US" sz="1350" dirty="0"/>
           </a:p>
@@ -4666,6 +4702,10 @@
             </a:outerShdw>
           </a:effectLst>
         </p:spPr>
+        <p:txBody>
+          <a:bodyPr/>
+          <a:p/>
+        </p:txBody>
       </p:sp>
       <p:sp>
         <p:nvSpPr>
@@ -4771,6 +4811,10 @@
             <a:prstDash val="solid"/>
           </a:ln>
         </p:spPr>
+        <p:txBody>
+          <a:bodyPr/>
+          <a:p/>
+        </p:txBody>
       </p:sp>
       <p:sp>
         <p:nvSpPr>
@@ -4844,6 +4888,10 @@
             </a:outerShdw>
           </a:effectLst>
         </p:spPr>
+        <p:txBody>
+          <a:bodyPr/>
+          <a:p/>
+        </p:txBody>
       </p:sp>
       <p:sp>
         <p:nvSpPr>
@@ -4949,6 +4997,10 @@
             <a:prstDash val="solid"/>
           </a:ln>
         </p:spPr>
+        <p:txBody>
+          <a:bodyPr/>
+          <a:p/>
+        </p:txBody>
       </p:sp>
       <p:sp>
         <p:nvSpPr>
@@ -5022,6 +5074,10 @@
             </a:outerShdw>
           </a:effectLst>
         </p:spPr>
+        <p:txBody>
+          <a:bodyPr/>
+          <a:p/>
+        </p:txBody>
       </p:sp>
       <p:sp>
         <p:nvSpPr>
@@ -5127,6 +5183,10 @@
             <a:prstDash val="solid"/>
           </a:ln>
         </p:spPr>
+        <p:txBody>
+          <a:bodyPr/>
+          <a:p/>
+        </p:txBody>
       </p:sp>
       <p:sp>
         <p:nvSpPr>
@@ -5200,6 +5260,10 @@
             </a:outerShdw>
           </a:effectLst>
         </p:spPr>
+        <p:txBody>
+          <a:bodyPr/>
+          <a:p/>
+        </p:txBody>
       </p:sp>
       <p:sp>
         <p:nvSpPr>
@@ -5305,6 +5369,10 @@
             <a:prstDash val="solid"/>
           </a:ln>
         </p:spPr>
+        <p:txBody>
+          <a:bodyPr/>
+          <a:p/>
+        </p:txBody>
       </p:sp>
       <p:sp>
         <p:nvSpPr>
@@ -5566,6 +5634,10 @@
             </a:outerShdw>
           </a:effectLst>
         </p:spPr>
+        <p:txBody>
+          <a:bodyPr/>
+          <a:p/>
+        </p:txBody>
       </p:sp>
       <p:sp>
         <p:nvSpPr>
@@ -5600,7 +5672,7 @@
                 <a:ea typeface="Segoe UI" pitchFamily="34" charset="-122"/>
                 <a:cs typeface="Segoe UI" pitchFamily="34" charset="-120"/>
               </a:rPr>
-              <a:t>WITHOUT SENTINEL</a:t>
+              <a:t>WITHOUT WHENCE</a:t>
             </a:r>
             <a:endParaRPr lang="en-US" sz="1300" dirty="0"/>
           </a:p>
@@ -5720,6 +5792,10 @@
             </a:outerShdw>
           </a:effectLst>
         </p:spPr>
+        <p:txBody>
+          <a:bodyPr/>
+          <a:p/>
+        </p:txBody>
       </p:sp>
       <p:sp>
         <p:nvSpPr>
@@ -5754,7 +5830,7 @@
                 <a:ea typeface="Segoe UI" pitchFamily="34" charset="-122"/>
                 <a:cs typeface="Segoe UI" pitchFamily="34" charset="-120"/>
               </a:rPr>
-              <a:t>WITH SENTINEL</a:t>
+              <a:t>WITH WHENCE</a:t>
             </a:r>
             <a:endParaRPr lang="en-US" sz="1300" dirty="0"/>
           </a:p>
@@ -6062,6 +6138,10 @@
             </a:outerShdw>
           </a:effectLst>
         </p:spPr>
+        <p:txBody>
+          <a:bodyPr/>
+          <a:p/>
+        </p:txBody>
       </p:sp>
       <p:sp>
         <p:nvSpPr>
@@ -6177,6 +6257,10 @@
             </a:outerShdw>
           </a:effectLst>
         </p:spPr>
+        <p:txBody>
+          <a:bodyPr/>
+          <a:p/>
+        </p:txBody>
       </p:sp>
       <p:sp>
         <p:nvSpPr>
@@ -6292,6 +6376,10 @@
             </a:outerShdw>
           </a:effectLst>
         </p:spPr>
+        <p:txBody>
+          <a:bodyPr/>
+          <a:p/>
+        </p:txBody>
       </p:sp>
       <p:sp>
         <p:nvSpPr>
@@ -6368,7 +6456,7 @@
                 <a:ea typeface="Segoe UI" pitchFamily="34" charset="-122"/>
                 <a:cs typeface="Segoe UI" pitchFamily="34" charset="-120"/>
               </a:rPr>
-              <a:t>The protected agent runs on Foundry Agent Service, connected to SENTINEL as its only tool endpoint.</a:t>
+              <a:t>The protected agent runs on Foundry Agent Service, connected to WHENCE as its only tool endpoint.</a:t>
             </a:r>
             <a:endParaRPr lang="en-US" sz="1150" dirty="0"/>
           </a:p>
@@ -6407,6 +6495,10 @@
             </a:outerShdw>
           </a:effectLst>
         </p:spPr>
+        <p:txBody>
+          <a:bodyPr/>
+          <a:p/>
+        </p:txBody>
       </p:sp>
       <p:sp>
         <p:nvSpPr>
@@ -6522,6 +6614,10 @@
             </a:outerShdw>
           </a:effectLst>
         </p:spPr>
+        <p:txBody>
+          <a:bodyPr/>
+          <a:p/>
+        </p:txBody>
       </p:sp>
       <p:sp>
         <p:nvSpPr>
@@ -6637,6 +6733,10 @@
             </a:outerShdw>
           </a:effectLst>
         </p:spPr>
+        <p:txBody>
+          <a:bodyPr/>
+          <a:p/>
+        </p:txBody>
       </p:sp>
       <p:sp>
         <p:nvSpPr>
@@ -6940,6 +7040,10 @@
             </a:outerShdw>
           </a:effectLst>
         </p:spPr>
+        <p:txBody>
+          <a:bodyPr/>
+          <a:p/>
+        </p:txBody>
       </p:sp>
       <p:sp>
         <p:nvSpPr>
@@ -7052,6 +7156,10 @@
             </a:outerShdw>
           </a:effectLst>
         </p:spPr>
+        <p:txBody>
+          <a:bodyPr/>
+          <a:p/>
+        </p:txBody>
       </p:sp>
       <p:sp>
         <p:nvSpPr>
@@ -7164,6 +7272,10 @@
             </a:outerShdw>
           </a:effectLst>
         </p:spPr>
+        <p:txBody>
+          <a:bodyPr/>
+          <a:p/>
+        </p:txBody>
       </p:sp>
       <p:sp>
         <p:nvSpPr>
@@ -7276,6 +7388,10 @@
             </a:outerShdw>
           </a:effectLst>
         </p:spPr>
+        <p:txBody>
+          <a:bodyPr/>
+          <a:p/>
+        </p:txBody>
       </p:sp>
       <p:sp>
         <p:nvSpPr>
@@ -7388,6 +7504,10 @@
             </a:outerShdw>
           </a:effectLst>
         </p:spPr>
+        <p:txBody>
+          <a:bodyPr/>
+          <a:p/>
+        </p:txBody>
       </p:sp>
       <p:sp>
         <p:nvSpPr>
@@ -7503,6 +7623,10 @@
             </a:outerShdw>
           </a:effectLst>
         </p:spPr>
+        <p:txBody>
+          <a:bodyPr/>
+          <a:p/>
+        </p:txBody>
       </p:sp>
       <p:sp>
         <p:nvSpPr>
@@ -7618,6 +7742,10 @@
             </a:outerShdw>
           </a:effectLst>
         </p:spPr>
+        <p:txBody>
+          <a:bodyPr/>
+          <a:p/>
+        </p:txBody>
       </p:sp>
       <p:sp>
         <p:nvSpPr>
@@ -7963,7 +8091,7 @@
                 <a:ea typeface="Segoe UI" pitchFamily="34" charset="-122"/>
                 <a:cs typeface="Segoe UI" pitchFamily="34" charset="-120"/>
               </a:rPr>
-              <a:t>Point any MCP-speaking agent at SENTINEL and it is protected — Microsoft Foundry, Claude, GPT, or custom. No SDK, no code modification.</a:t>
+              <a:t>Point any MCP-speaking agent at WHENCE and it is protected — Microsoft Foundry, Claude, GPT, or custom. No SDK, no code modification.</a:t>
             </a:r>
             <a:endParaRPr lang="en-US" sz="1400" dirty="0"/>
           </a:p>
@@ -8044,7 +8172,7 @@
                 <a:ea typeface="Segoe UI" pitchFamily="34" charset="-122"/>
                 <a:cs typeface="Segoe UI" pitchFamily="34" charset="-120"/>
               </a:rPr>
-              <a:t>MCP is the emerging standard for agent tools. SENTINEL secures it as infrastructure — one proxy protects every agent behind it.</a:t>
+              <a:t>MCP is the emerging standard for agent tools. WHENCE secures it as infrastructure — one proxy protects every agent behind it.</a:t>
             </a:r>
             <a:endParaRPr lang="en-US" sz="1400" dirty="0"/>
           </a:p>
@@ -8164,7 +8292,7 @@
                 <a:ea typeface="Segoe UI" pitchFamily="34" charset="-122"/>
                 <a:cs typeface="Segoe UI" pitchFamily="34" charset="-120"/>
               </a:rPr>
-              <a:t>Honest scope: SENTINEL secures the actions an agent takes, not the model's inner reasoning — and states that boundary precisely.</a:t>
+              <a:t>Honest scope: WHENCE secures the actions an agent takes, not the model's inner reasoning — and states that boundary precisely.</a:t>
             </a:r>
             <a:endParaRPr lang="en-US" sz="1300" dirty="0"/>
           </a:p>
